--- a/ft-rice/review-response/Figure 4.pptx
+++ b/ft-rice/review-response/Figure 4.pptx
@@ -3120,9 +3120,44 @@
           </a:prstGeom>
         </p:spPr>
       </p:pic>
+      <p:sp>
+        <p:nvSpPr>
+          <p:cNvPr id="21" name="文本框 20"/>
+          <p:cNvSpPr txBox="1"/>
+          <p:nvPr/>
+        </p:nvSpPr>
+        <p:spPr>
+          <a:xfrm>
+            <a:off x="6423660" y="4464685"/>
+            <a:ext cx="673100" cy="411480"/>
+          </a:xfrm>
+          <a:prstGeom prst="rect">
+            <a:avLst/>
+          </a:prstGeom>
+          <a:noFill/>
+        </p:spPr>
+        <p:txBody>
+          <a:bodyPr wrap="square" rtlCol="0">
+            <a:noAutofit/>
+          </a:bodyPr>
+          <a:p>
+            <a:r>
+              <a:rPr lang="en-US" altLang="zh-CN" sz="2000">
+                <a:latin typeface="Arial" panose="020B0604020202020204" pitchFamily="34" charset="0"/>
+                <a:cs typeface="Arial" panose="020B0604020202020204" pitchFamily="34" charset="0"/>
+              </a:rPr>
+              <a:t>D</a:t>
+            </a:r>
+            <a:endParaRPr lang="en-US" altLang="zh-CN" sz="2000">
+              <a:latin typeface="Arial" panose="020B0604020202020204" pitchFamily="34" charset="0"/>
+              <a:cs typeface="Arial" panose="020B0604020202020204" pitchFamily="34" charset="0"/>
+            </a:endParaRPr>
+          </a:p>
+        </p:txBody>
+      </p:sp>
       <p:pic>
         <p:nvPicPr>
-          <p:cNvPr id="6" name="图片 5"/>
+          <p:cNvPr id="2" name="图片 1"/>
           <p:cNvPicPr>
             <a:picLocks noChangeAspect="1"/>
           </p:cNvPicPr>
@@ -3136,49 +3171,14 @@
         </p:blipFill>
         <p:spPr>
           <a:xfrm>
-            <a:off x="503555" y="4560570"/>
-            <a:ext cx="6015355" cy="2453640"/>
+            <a:off x="389255" y="4540885"/>
+            <a:ext cx="4055110" cy="2493010"/>
           </a:xfrm>
           <a:prstGeom prst="rect">
             <a:avLst/>
           </a:prstGeom>
         </p:spPr>
       </p:pic>
-      <p:sp>
-        <p:nvSpPr>
-          <p:cNvPr id="21" name="文本框 20"/>
-          <p:cNvSpPr txBox="1"/>
-          <p:nvPr/>
-        </p:nvSpPr>
-        <p:spPr>
-          <a:xfrm>
-            <a:off x="6423660" y="4464685"/>
-            <a:ext cx="673100" cy="411480"/>
-          </a:xfrm>
-          <a:prstGeom prst="rect">
-            <a:avLst/>
-          </a:prstGeom>
-          <a:noFill/>
-        </p:spPr>
-        <p:txBody>
-          <a:bodyPr wrap="square" rtlCol="0">
-            <a:noAutofit/>
-          </a:bodyPr>
-          <a:p>
-            <a:r>
-              <a:rPr lang="en-US" altLang="zh-CN" sz="2000">
-                <a:latin typeface="Arial" panose="020B0604020202020204" pitchFamily="34" charset="0"/>
-                <a:cs typeface="Arial" panose="020B0604020202020204" pitchFamily="34" charset="0"/>
-              </a:rPr>
-              <a:t>D</a:t>
-            </a:r>
-            <a:endParaRPr lang="en-US" altLang="zh-CN" sz="2000">
-              <a:latin typeface="Arial" panose="020B0604020202020204" pitchFamily="34" charset="0"/>
-              <a:cs typeface="Arial" panose="020B0604020202020204" pitchFamily="34" charset="0"/>
-            </a:endParaRPr>
-          </a:p>
-        </p:txBody>
-      </p:sp>
       <p:sp>
         <p:nvSpPr>
           <p:cNvPr id="17" name="文本框 16"/>
@@ -3214,6 +3214,30 @@
           </a:p>
         </p:txBody>
       </p:sp>
+      <p:pic>
+        <p:nvPicPr>
+          <p:cNvPr id="4" name="图片 3"/>
+          <p:cNvPicPr>
+            <a:picLocks noChangeAspect="1"/>
+          </p:cNvPicPr>
+          <p:nvPr/>
+        </p:nvPicPr>
+        <p:blipFill>
+          <a:blip r:embed="rId5"/>
+          <a:stretch>
+            <a:fillRect/>
+          </a:stretch>
+        </p:blipFill>
+        <p:spPr>
+          <a:xfrm>
+            <a:off x="4114800" y="4540885"/>
+            <a:ext cx="3399790" cy="2098675"/>
+          </a:xfrm>
+          <a:prstGeom prst="rect">
+            <a:avLst/>
+          </a:prstGeom>
+        </p:spPr>
+      </p:pic>
     </p:spTree>
   </p:cSld>
   <p:clrMapOvr>
